--- a/outputs/produkte/mama-ceo/03-praesentationen/saeule-5/04-lektion-5-4.pptx
+++ b/outputs/produkte/mama-ceo/03-praesentationen/saeule-5/04-lektion-5-4.pptx
@@ -4140,6 +4140,14 @@
 <file path=ppt/slides/slide1.xml><?xml version="1.0" encoding="utf-8"?>
 <p:sld xmlns:a="http://schemas.openxmlformats.org/drawingml/2006/main" xmlns:p="http://schemas.openxmlformats.org/presentationml/2006/main" xmlns:r="http://schemas.openxmlformats.org/officeDocument/2006/relationships">
   <p:cSld>
+    <p:bg>
+      <p:bgPr>
+        <a:solidFill>
+          <a:srgbClr val="F1ECDD"/>
+        </a:solidFill>
+        <a:effectLst/>
+      </p:bgPr>
+    </p:bg>
     <p:spTree>
       <p:nvGrpSpPr>
         <p:cNvPr id="1" name=""/>
@@ -4415,6 +4423,14 @@
 <file path=ppt/slides/slide10.xml><?xml version="1.0" encoding="utf-8"?>
 <p:sld xmlns:a="http://schemas.openxmlformats.org/drawingml/2006/main" xmlns:p="http://schemas.openxmlformats.org/presentationml/2006/main" xmlns:r="http://schemas.openxmlformats.org/officeDocument/2006/relationships">
   <p:cSld>
+    <p:bg>
+      <p:bgPr>
+        <a:solidFill>
+          <a:srgbClr val="F1ECDD"/>
+        </a:solidFill>
+        <a:effectLst/>
+      </p:bgPr>
+    </p:bg>
     <p:spTree>
       <p:nvGrpSpPr>
         <p:cNvPr id="1" name=""/>
@@ -4490,7 +4506,7 @@
                 </a:solidFill>
                 <a:latin typeface="Calibri"/>
               </a:rPr>
-              <a:t>▸  </a:t>
+              <a:t>✓  </a:t>
             </a:r>
             <a:r>
               <a:rPr sz="1600" b="0">
@@ -4515,7 +4531,7 @@
                 </a:solidFill>
                 <a:latin typeface="Calibri"/>
               </a:rPr>
-              <a:t>▸  </a:t>
+              <a:t>✓  </a:t>
             </a:r>
             <a:r>
               <a:rPr sz="1600" b="0">
@@ -4540,7 +4556,7 @@
                 </a:solidFill>
                 <a:latin typeface="Calibri"/>
               </a:rPr>
-              <a:t>▸  </a:t>
+              <a:t>✓  </a:t>
             </a:r>
             <a:r>
               <a:rPr sz="1600" b="0">
@@ -4634,6 +4650,14 @@
 <file path=ppt/slides/slide2.xml><?xml version="1.0" encoding="utf-8"?>
 <p:sld xmlns:a="http://schemas.openxmlformats.org/drawingml/2006/main" xmlns:p="http://schemas.openxmlformats.org/presentationml/2006/main" xmlns:r="http://schemas.openxmlformats.org/officeDocument/2006/relationships">
   <p:cSld>
+    <p:bg>
+      <p:bgPr>
+        <a:solidFill>
+          <a:srgbClr val="F1ECDD"/>
+        </a:solidFill>
+        <a:effectLst/>
+      </p:bgPr>
+    </p:bg>
     <p:spTree>
       <p:nvGrpSpPr>
         <p:cNvPr id="1" name=""/>
@@ -4709,7 +4733,7 @@
                 </a:solidFill>
                 <a:latin typeface="Calibri"/>
               </a:rPr>
-              <a:t>▸  </a:t>
+              <a:t>✓  </a:t>
             </a:r>
             <a:r>
               <a:rPr sz="1600" b="0">
@@ -4734,7 +4758,7 @@
                 </a:solidFill>
                 <a:latin typeface="Calibri"/>
               </a:rPr>
-              <a:t>▸  </a:t>
+              <a:t>✓  </a:t>
             </a:r>
             <a:r>
               <a:rPr sz="1600" b="0">
@@ -4759,7 +4783,7 @@
                 </a:solidFill>
                 <a:latin typeface="Calibri"/>
               </a:rPr>
-              <a:t>▸  </a:t>
+              <a:t>✓  </a:t>
             </a:r>
             <a:r>
               <a:rPr sz="1600" b="0">
@@ -4853,6 +4877,14 @@
 <file path=ppt/slides/slide3.xml><?xml version="1.0" encoding="utf-8"?>
 <p:sld xmlns:a="http://schemas.openxmlformats.org/drawingml/2006/main" xmlns:p="http://schemas.openxmlformats.org/presentationml/2006/main" xmlns:r="http://schemas.openxmlformats.org/officeDocument/2006/relationships">
   <p:cSld>
+    <p:bg>
+      <p:bgPr>
+        <a:solidFill>
+          <a:srgbClr val="F1ECDD"/>
+        </a:solidFill>
+        <a:effectLst/>
+      </p:bgPr>
+    </p:bg>
     <p:spTree>
       <p:nvGrpSpPr>
         <p:cNvPr id="1" name=""/>
@@ -4928,7 +4960,7 @@
                 </a:solidFill>
                 <a:latin typeface="Calibri"/>
               </a:rPr>
-              <a:t>▸  </a:t>
+              <a:t>✓  </a:t>
             </a:r>
             <a:r>
               <a:rPr sz="1600" b="0">
@@ -4953,7 +4985,7 @@
                 </a:solidFill>
                 <a:latin typeface="Calibri"/>
               </a:rPr>
-              <a:t>▸  </a:t>
+              <a:t>✓  </a:t>
             </a:r>
             <a:r>
               <a:rPr sz="1600" b="0">
@@ -4978,7 +5010,7 @@
                 </a:solidFill>
                 <a:latin typeface="Calibri"/>
               </a:rPr>
-              <a:t>▸  </a:t>
+              <a:t>✓  </a:t>
             </a:r>
             <a:r>
               <a:rPr sz="1600" b="0">
@@ -5072,6 +5104,14 @@
 <file path=ppt/slides/slide4.xml><?xml version="1.0" encoding="utf-8"?>
 <p:sld xmlns:a="http://schemas.openxmlformats.org/drawingml/2006/main" xmlns:p="http://schemas.openxmlformats.org/presentationml/2006/main" xmlns:r="http://schemas.openxmlformats.org/officeDocument/2006/relationships">
   <p:cSld>
+    <p:bg>
+      <p:bgPr>
+        <a:solidFill>
+          <a:srgbClr val="F1ECDD"/>
+        </a:solidFill>
+        <a:effectLst/>
+      </p:bgPr>
+    </p:bg>
     <p:spTree>
       <p:nvGrpSpPr>
         <p:cNvPr id="1" name=""/>
@@ -5147,7 +5187,7 @@
                 </a:solidFill>
                 <a:latin typeface="Calibri"/>
               </a:rPr>
-              <a:t>▸  </a:t>
+              <a:t>✓  </a:t>
             </a:r>
             <a:r>
               <a:rPr sz="1600" b="0">
@@ -5172,7 +5212,7 @@
                 </a:solidFill>
                 <a:latin typeface="Calibri"/>
               </a:rPr>
-              <a:t>▸  </a:t>
+              <a:t>✓  </a:t>
             </a:r>
             <a:r>
               <a:rPr sz="1600" b="0">
@@ -5197,7 +5237,7 @@
                 </a:solidFill>
                 <a:latin typeface="Calibri"/>
               </a:rPr>
-              <a:t>▸  </a:t>
+              <a:t>✓  </a:t>
             </a:r>
             <a:r>
               <a:rPr sz="1600" b="0">
@@ -5291,6 +5331,14 @@
 <file path=ppt/slides/slide5.xml><?xml version="1.0" encoding="utf-8"?>
 <p:sld xmlns:a="http://schemas.openxmlformats.org/drawingml/2006/main" xmlns:p="http://schemas.openxmlformats.org/presentationml/2006/main" xmlns:r="http://schemas.openxmlformats.org/officeDocument/2006/relationships">
   <p:cSld>
+    <p:bg>
+      <p:bgPr>
+        <a:solidFill>
+          <a:srgbClr val="F1ECDD"/>
+        </a:solidFill>
+        <a:effectLst/>
+      </p:bgPr>
+    </p:bg>
     <p:spTree>
       <p:nvGrpSpPr>
         <p:cNvPr id="1" name=""/>
@@ -5366,7 +5414,7 @@
                 </a:solidFill>
                 <a:latin typeface="Calibri"/>
               </a:rPr>
-              <a:t>▸  </a:t>
+              <a:t>✓  </a:t>
             </a:r>
             <a:r>
               <a:rPr sz="1600" b="0">
@@ -5391,7 +5439,7 @@
                 </a:solidFill>
                 <a:latin typeface="Calibri"/>
               </a:rPr>
-              <a:t>▸  </a:t>
+              <a:t>✓  </a:t>
             </a:r>
             <a:r>
               <a:rPr sz="1600" b="0">
@@ -5416,7 +5464,7 @@
                 </a:solidFill>
                 <a:latin typeface="Calibri"/>
               </a:rPr>
-              <a:t>▸  </a:t>
+              <a:t>✓  </a:t>
             </a:r>
             <a:r>
               <a:rPr sz="1600" b="0">
@@ -5510,6 +5558,14 @@
 <file path=ppt/slides/slide6.xml><?xml version="1.0" encoding="utf-8"?>
 <p:sld xmlns:a="http://schemas.openxmlformats.org/drawingml/2006/main" xmlns:p="http://schemas.openxmlformats.org/presentationml/2006/main" xmlns:r="http://schemas.openxmlformats.org/officeDocument/2006/relationships">
   <p:cSld>
+    <p:bg>
+      <p:bgPr>
+        <a:solidFill>
+          <a:srgbClr val="F1ECDD"/>
+        </a:solidFill>
+        <a:effectLst/>
+      </p:bgPr>
+    </p:bg>
     <p:spTree>
       <p:nvGrpSpPr>
         <p:cNvPr id="1" name=""/>
@@ -5585,7 +5641,7 @@
                 </a:solidFill>
                 <a:latin typeface="Calibri"/>
               </a:rPr>
-              <a:t>▸  </a:t>
+              <a:t>✓  </a:t>
             </a:r>
             <a:r>
               <a:rPr sz="1600" b="0">
@@ -5610,7 +5666,7 @@
                 </a:solidFill>
                 <a:latin typeface="Calibri"/>
               </a:rPr>
-              <a:t>▸  </a:t>
+              <a:t>✓  </a:t>
             </a:r>
             <a:r>
               <a:rPr sz="1600" b="0">
@@ -5635,7 +5691,7 @@
                 </a:solidFill>
                 <a:latin typeface="Calibri"/>
               </a:rPr>
-              <a:t>▸  </a:t>
+              <a:t>✓  </a:t>
             </a:r>
             <a:r>
               <a:rPr sz="1600" b="0">
@@ -5729,6 +5785,14 @@
 <file path=ppt/slides/slide7.xml><?xml version="1.0" encoding="utf-8"?>
 <p:sld xmlns:a="http://schemas.openxmlformats.org/drawingml/2006/main" xmlns:p="http://schemas.openxmlformats.org/presentationml/2006/main" xmlns:r="http://schemas.openxmlformats.org/officeDocument/2006/relationships">
   <p:cSld>
+    <p:bg>
+      <p:bgPr>
+        <a:solidFill>
+          <a:srgbClr val="F1ECDD"/>
+        </a:solidFill>
+        <a:effectLst/>
+      </p:bgPr>
+    </p:bg>
     <p:spTree>
       <p:nvGrpSpPr>
         <p:cNvPr id="1" name=""/>
@@ -5804,7 +5868,7 @@
                 </a:solidFill>
                 <a:latin typeface="Calibri"/>
               </a:rPr>
-              <a:t>▸  </a:t>
+              <a:t>✓  </a:t>
             </a:r>
             <a:r>
               <a:rPr sz="1600" b="0">
@@ -5829,7 +5893,7 @@
                 </a:solidFill>
                 <a:latin typeface="Calibri"/>
               </a:rPr>
-              <a:t>▸  </a:t>
+              <a:t>✓  </a:t>
             </a:r>
             <a:r>
               <a:rPr sz="1600" b="0">
@@ -5854,7 +5918,7 @@
                 </a:solidFill>
                 <a:latin typeface="Calibri"/>
               </a:rPr>
-              <a:t>▸  </a:t>
+              <a:t>✓  </a:t>
             </a:r>
             <a:r>
               <a:rPr sz="1600" b="0">
@@ -5948,6 +6012,14 @@
 <file path=ppt/slides/slide8.xml><?xml version="1.0" encoding="utf-8"?>
 <p:sld xmlns:a="http://schemas.openxmlformats.org/drawingml/2006/main" xmlns:p="http://schemas.openxmlformats.org/presentationml/2006/main" xmlns:r="http://schemas.openxmlformats.org/officeDocument/2006/relationships">
   <p:cSld>
+    <p:bg>
+      <p:bgPr>
+        <a:solidFill>
+          <a:srgbClr val="F1ECDD"/>
+        </a:solidFill>
+        <a:effectLst/>
+      </p:bgPr>
+    </p:bg>
     <p:spTree>
       <p:nvGrpSpPr>
         <p:cNvPr id="1" name=""/>
@@ -6023,7 +6095,7 @@
                 </a:solidFill>
                 <a:latin typeface="Calibri"/>
               </a:rPr>
-              <a:t>▸  </a:t>
+              <a:t>✓  </a:t>
             </a:r>
             <a:r>
               <a:rPr sz="1600" b="0">
@@ -6048,7 +6120,7 @@
                 </a:solidFill>
                 <a:latin typeface="Calibri"/>
               </a:rPr>
-              <a:t>▸  </a:t>
+              <a:t>✓  </a:t>
             </a:r>
             <a:r>
               <a:rPr sz="1600" b="0">
@@ -6073,7 +6145,7 @@
                 </a:solidFill>
                 <a:latin typeface="Calibri"/>
               </a:rPr>
-              <a:t>▸  </a:t>
+              <a:t>✓  </a:t>
             </a:r>
             <a:r>
               <a:rPr sz="1600" b="0">
@@ -6167,6 +6239,14 @@
 <file path=ppt/slides/slide9.xml><?xml version="1.0" encoding="utf-8"?>
 <p:sld xmlns:a="http://schemas.openxmlformats.org/drawingml/2006/main" xmlns:p="http://schemas.openxmlformats.org/presentationml/2006/main" xmlns:r="http://schemas.openxmlformats.org/officeDocument/2006/relationships">
   <p:cSld>
+    <p:bg>
+      <p:bgPr>
+        <a:solidFill>
+          <a:srgbClr val="F1ECDD"/>
+        </a:solidFill>
+        <a:effectLst/>
+      </p:bgPr>
+    </p:bg>
     <p:spTree>
       <p:nvGrpSpPr>
         <p:cNvPr id="1" name=""/>
@@ -6242,7 +6322,7 @@
                 </a:solidFill>
                 <a:latin typeface="Calibri"/>
               </a:rPr>
-              <a:t>▸  </a:t>
+              <a:t>✓  </a:t>
             </a:r>
             <a:r>
               <a:rPr sz="1600" b="0">
@@ -6267,7 +6347,7 @@
                 </a:solidFill>
                 <a:latin typeface="Calibri"/>
               </a:rPr>
-              <a:t>▸  </a:t>
+              <a:t>✓  </a:t>
             </a:r>
             <a:r>
               <a:rPr sz="1600" b="0">
@@ -6292,7 +6372,7 @@
                 </a:solidFill>
                 <a:latin typeface="Calibri"/>
               </a:rPr>
-              <a:t>▸  </a:t>
+              <a:t>✓  </a:t>
             </a:r>
             <a:r>
               <a:rPr sz="1600" b="0">

--- a/outputs/produkte/mama-ceo/03-praesentationen/saeule-5/04-lektion-5-4.pptx
+++ b/outputs/produkte/mama-ceo/03-praesentationen/saeule-5/04-lektion-5-4.pptx
@@ -581,7 +581,7 @@
           <a:lstStyle/>
           <a:p>
             <a:r>
-              <a:t>Im Arbeitsblatt schreibst du deinen 90-Tage-Plan und deine Nicht-Liste. Und dann sag ich dir von Herzen: du bist jetzt Mama-CEO. Nicht weil alles perfekt ist, sondern weil du führst statt funktionierst. Ich bin so stolz auf dich. Wir sehen uns im Abschluss-Call.</a:t>
+              <a:t>Schau, was du in acht Wochen gebaut hast: Zeit, ein neues Mindset, eine Struktur in Notion, zwei KI-Mitarbeiter, eine klare Matrix und jetzt einen konkreten Plan für drei Monate. Im Arbeitsblatt füllst du diesen Plan aus. Und dann sag ich dir von Herzen: du bist jetzt Mama-CEO, nicht weil alles perfekt ist, sondern weil du führst statt funktionierst. Wir sehen uns im Live-Call vier, bring deinen Plan mit.</a:t>
             </a:r>
           </a:p>
         </p:txBody>
@@ -651,7 +651,7 @@
           <a:lstStyle/>
           <a:p>
             <a:r>
-              <a:t>Dein Plan kommt direkt aus deiner Matrix. Du hast dort gesehen, was zu KI und System soll. Jetzt entscheidest du nur noch: was davon baue ich zuerst? Du erfindest nichts Neues, du priorisierst, was schon dasteht.</a:t>
+              <a:t>In Säule 3 hast du die Methode gelernt, wie man von oben nach unten plant. Jetzt machen wir's konkret für dich: einen klaren Plan für die nächsten drei Monate. Am Ende dieser Lektion weisst du an jedem einzelnen Tag, was zu tun ist, und musst nie wieder morgens überlegen, wo du anfängst.</a:t>
             </a:r>
           </a:p>
         </p:txBody>
@@ -721,7 +721,7 @@
           <a:lstStyle/>
           <a:p>
             <a:r>
-              <a:t>Und jetzt die wichtigste Begrenzung: maximal drei Sachen für neunzig Tage. Nicht zehn. Drei konkrete Dinge, die du baust oder einrichtest, zum Beispiel einen weiteren Bot, eine Automatik, ein abgegebenes Ämtli. Drei, die du wirklich durchziehst, sind mehr wert als zehn, die du anfängst.</a:t>
+              <a:t>Das Geheimnis ist Fokus: pro Monat gibt es EIN Zentrum. Ein Thema, über das du redest, ein 0-Euro-Angebot, mit dem du Leute reinholst, und ein Produkt, das du verkaufst. Genau das Monats-Trio aus Säule 3. Nicht zehn Themen gleichzeitig, eines pro Monat, das du richtig ausspielst.</a:t>
             </a:r>
           </a:p>
         </p:txBody>
@@ -791,7 +791,7 @@
           <a:lstStyle/>
           <a:p>
             <a:r>
-              <a:t>Und jetzt mein Lieblingsteil, der fast nie gemacht wird: schreib auf, was du in diesen neunzig Tagen bewusst NICHT machst. Kein neues Tool, keine neue Plattform, kein neues Produkt. Diese Nicht-Liste schützt deinen Fokus mehr als jede To-do-Liste.</a:t>
+              <a:t>Ich zeig dir meine eigenen nächsten drei Monate als Beispiel, damit du siehst, wie schlicht das aussieht. Eine Zeile pro Monat: Thema, 0-Euro-Angebot, Produkt. Mehr braucht das Grundgerüst nicht. Du füllst gleich deine eigenen drei Zeilen.</a:t>
             </a:r>
           </a:p>
         </p:txBody>
@@ -861,7 +861,7 @@
           <a:lstStyle/>
           <a:p>
             <a:r>
-              <a:t>Und damit du wirklich ins Tun kommst, der wichtigste Satz zum Schluss: fertig ist besser als perfekt. Deine Bots dürfen holprig starten, deine Systeme dürfen Version eins sein. Du verbesserst im Tun, nicht im Grübeln. Das ist der Unterschied zwischen Mamas, die planen, und Mama-CEOs, die liefern.</a:t>
+              <a:t>Und jetzt der wichtigste Denk-Dreh: du planst rückwärts. Du nimmst dein Monatsziel, zum Beispiel diesen Launch am Monatsende, und rechnest rückwärts, was vorher passieren muss. Welche Mails, welche Story-Tage, welcher Content, welches Freebie zuerst. So zerfällt ein grosses Ziel in lauter kleine, machbare Aufgaben.</a:t>
             </a:r>
           </a:p>
         </p:txBody>
@@ -931,7 +931,7 @@
           <a:lstStyle/>
           <a:p>
             <a:r>
-              <a:t>Du bist nach diesem Programm nicht allein. Die Community bleibt offen, auch nach den acht Wochen. Da hast du deine Sparring-Partnerinnen, da fragst du nach, da feierst du Erfolge. Skalieren ist leichter, wenn man nicht allein ist.</a:t>
+              <a:t>Diese Aufgaben schreibst du nicht auf einen Zettel, der verschwindet, sondern direkt in deine Notion-Aufgabenliste aus Säule 3. Und jetzt zahlt sich alles aus: dein Cockpit-Bot aus Säule 4 serviert dir jeden Morgen genau die Aufgaben, die heute dran sind. Du musst nie wieder den Plan suchen, er kommt zu dir.</a:t>
             </a:r>
           </a:p>
         </p:txBody>
@@ -1001,7 +1001,7 @@
           <a:lstStyle/>
           <a:p>
             <a:r>
-              <a:t>Und dein wichtigster Begleiter ist dein Cockpit-Bot aus Säule 4. Der erinnert dich jeden Morgen an deinen Plan, hält dich auf Kurs und wächst mit dir mit. Das Programm endet, aber dein System läuft weiter, jeden Tag.</a:t>
+              <a:t>Und bei jeder Aufgabe stellst du die Matrix-Frage aus dieser Säule: mach ich das selbst, oder kann es die KI vorbereiten, oder läuft es über ein System? So ist dein Plan nicht nur klar, sondern auch leicht, weil die Hälfte gar nicht mehr auf deinem Tisch landet.</a:t>
             </a:r>
           </a:p>
         </p:txBody>
@@ -1071,7 +1071,7 @@
           <a:lstStyle/>
           <a:p>
             <a:r>
-              <a:t>Im Live-Call vier feiern wir gemeinsam, was du in diesen Wochen gebaut hast, und du stellst deinen 90-Tage-Plan vor. Komm mit deiner Matrix und deinem Plan, dann nehmen wir ihn nochmal zusammen unter die Lupe.</a:t>
+              <a:t>Und mein Lieblingsteil, der fast nie gemacht wird: schreib auf, was du in diesen drei Monaten bewusst NICHT machst. Kein neues Tool, keine neue Plattform, kein fünftes Thema. Diese Nicht-Liste schützt deinen Fokus mehr als jede To-do-Liste, weil sie dich vor dir selbst bewahrt.</a:t>
             </a:r>
           </a:p>
         </p:txBody>
@@ -1141,7 +1141,7 @@
           <a:lstStyle/>
           <a:p>
             <a:r>
-              <a:t>Schau, was du in acht Wochen gebaut hast: du hast dir Zeit geschaffen, dein Mindset gedreht, eine Struktur in Notion, zwei KI-Mitarbeiter und eine klare Matrix für dein ganzes Business. Das ist kein Kleinkram, das ist eine andere Art zu arbeiten.</a:t>
+              <a:t>Zwei Sätze zum Schluss. Erstens: fertig ist besser als perfekt, dein Plan darf Version eins sein, du verbesserst im Tun. Und zweitens: du bist nicht allein. Die Community bleibt offen, und dein Cockpit-Bot begleitet dich jeden Morgen weiter. Das Programm endet, dein System läuft weiter.</a:t>
             </a:r>
           </a:p>
         </p:txBody>
@@ -4515,7 +4515,7 @@
                 </a:solidFill>
                 <a:latin typeface="Calibri"/>
               </a:rPr>
-              <a:t>📋 Dein 90-Tage-Plan + Nicht-Liste</a:t>
+              <a:t>Zeit · Mindset · Struktur · KI · Matrix · Plan</a:t>
             </a:r>
           </a:p>
           <a:p>
@@ -4540,7 +4540,7 @@
                 </a:solidFill>
                 <a:latin typeface="Calibri"/>
               </a:rPr>
-              <a:t>Du führst statt zu funktionieren</a:t>
+              <a:t>📋 Plan im Arbeitsblatt ausfüllen</a:t>
             </a:r>
           </a:p>
           <a:p>
@@ -4565,7 +4565,7 @@
                 </a:solidFill>
                 <a:latin typeface="Calibri"/>
               </a:rPr>
-              <a:t>Wir sehen uns im Abschluss-Call 💛</a:t>
+              <a:t>Du führst statt zu funktionieren 💛</a:t>
             </a:r>
           </a:p>
         </p:txBody>
@@ -4694,7 +4694,7 @@
                 </a:solidFill>
                 <a:latin typeface="Georgia"/>
               </a:rPr>
-              <a:t>Aus der Matrix → ein Plan</a:t>
+              <a:t>Von der Methode zum konkreten Plan</a:t>
             </a:r>
           </a:p>
         </p:txBody>
@@ -4742,7 +4742,7 @@
                 </a:solidFill>
                 <a:latin typeface="Calibri"/>
               </a:rPr>
-              <a:t>Dein Plan kommt direkt aus der Matrix</a:t>
+              <a:t>Säule 3 = Methode gelernt</a:t>
             </a:r>
           </a:p>
           <a:p>
@@ -4767,7 +4767,7 @@
                 </a:solidFill>
                 <a:latin typeface="Calibri"/>
               </a:rPr>
-              <a:t>Du erfindest nichts Neues</a:t>
+              <a:t>Jetzt: DEINE nächsten 3 Monate</a:t>
             </a:r>
           </a:p>
           <a:p>
@@ -4792,7 +4792,7 @@
                 </a:solidFill>
                 <a:latin typeface="Calibri"/>
               </a:rPr>
-              <a:t>Du priorisierst, was schon dasteht</a:t>
+              <a:t>Am Ende weisst du jeden Tag, was zu tun ist</a:t>
             </a:r>
           </a:p>
         </p:txBody>
@@ -4921,7 +4921,7 @@
                 </a:solidFill>
                 <a:latin typeface="Georgia"/>
               </a:rPr>
-              <a:t>Die 3 Sachen für 90 Tage</a:t>
+              <a:t>Pro Monat EIN Zentrum</a:t>
             </a:r>
           </a:p>
         </p:txBody>
@@ -4969,7 +4969,7 @@
                 </a:solidFill>
                 <a:latin typeface="Calibri"/>
               </a:rPr>
-              <a:t>Maximal 3 konkrete Bauten</a:t>
+              <a:t>1 Thema · 1 0€-Angebot · 1 Produkt</a:t>
             </a:r>
           </a:p>
           <a:p>
@@ -4994,7 +4994,7 @@
                 </a:solidFill>
                 <a:latin typeface="Calibri"/>
               </a:rPr>
-              <a:t>z.B. ein Bot · eine Automatik · ein Ämtli</a:t>
+              <a:t>Das Monats-Trio aus Säule 3</a:t>
             </a:r>
           </a:p>
           <a:p>
@@ -5019,7 +5019,7 @@
                 </a:solidFill>
                 <a:latin typeface="Calibri"/>
               </a:rPr>
-              <a:t>3 durchgezogen &gt; 10 angefangen</a:t>
+              <a:t>Eines pro Monat, richtig ausgespielt</a:t>
             </a:r>
           </a:p>
         </p:txBody>
@@ -5148,7 +5148,7 @@
                 </a:solidFill>
                 <a:latin typeface="Georgia"/>
               </a:rPr>
-              <a:t>Was du JETZT NICHT machst</a:t>
+              <a:t>Beispiel: 3 Monate auf einen Blick</a:t>
             </a:r>
           </a:p>
         </p:txBody>
@@ -5196,7 +5196,7 @@
                 </a:solidFill>
                 <a:latin typeface="Calibri"/>
               </a:rPr>
-              <a:t>Bewusste Nicht-Liste</a:t>
+              <a:t>Tabelle: Monat 1/2/3</a:t>
             </a:r>
           </a:p>
           <a:p>
@@ -5221,7 +5221,7 @@
                 </a:solidFill>
                 <a:latin typeface="Calibri"/>
               </a:rPr>
-              <a:t>Kein neues Tool, keine neue Plattform, kein neues Produkt</a:t>
+              <a:t>je Zeile: Thema · 0€-Angebot · Produkt</a:t>
             </a:r>
           </a:p>
           <a:p>
@@ -5246,7 +5246,7 @@
                 </a:solidFill>
                 <a:latin typeface="Calibri"/>
               </a:rPr>
-              <a:t>Schützt deinen Fokus mehr als jede To-do-Liste</a:t>
+              <a:t>Mein Beispiel — dann füllst du deins</a:t>
             </a:r>
           </a:p>
         </p:txBody>
@@ -5375,7 +5375,7 @@
                 </a:solidFill>
                 <a:latin typeface="Georgia"/>
               </a:rPr>
-              <a:t>Fertig besser als perfekt</a:t>
+              <a:t>Rückwärts rechnen</a:t>
             </a:r>
           </a:p>
         </p:txBody>
@@ -5423,7 +5423,7 @@
                 </a:solidFill>
                 <a:latin typeface="Calibri"/>
               </a:rPr>
-              <a:t>Bots dürfen holprig starten</a:t>
+              <a:t>Vom Monatsziel → Wochen → Aufgaben</a:t>
             </a:r>
           </a:p>
           <a:p>
@@ -5448,7 +5448,7 @@
                 </a:solidFill>
                 <a:latin typeface="Calibri"/>
               </a:rPr>
-              <a:t>Systeme dürfen Version 1 sein</a:t>
+              <a:t>Launch rückwärts denken</a:t>
             </a:r>
           </a:p>
           <a:p>
@@ -5473,7 +5473,7 @@
                 </a:solidFill>
                 <a:latin typeface="Calibri"/>
               </a:rPr>
-              <a:t>Du verbesserst im Tun, nicht im Grübeln</a:t>
+              <a:t>Grosses Ziel → viele kleine Aufgaben</a:t>
             </a:r>
           </a:p>
         </p:txBody>
@@ -5602,7 +5602,7 @@
                 </a:solidFill>
                 <a:latin typeface="Georgia"/>
               </a:rPr>
-              <a:t>Wie's weitergeht: die Community</a:t>
+              <a:t>Ab in die Aufgabenliste</a:t>
             </a:r>
           </a:p>
         </p:txBody>
@@ -5650,7 +5650,7 @@
                 </a:solidFill>
                 <a:latin typeface="Calibri"/>
               </a:rPr>
-              <a:t>Telegram-Community bleibt offen</a:t>
+              <a:t>Aufgaben → Notion (aus Säule 3)</a:t>
             </a:r>
           </a:p>
           <a:p>
@@ -5675,7 +5675,7 @@
                 </a:solidFill>
                 <a:latin typeface="Calibri"/>
               </a:rPr>
-              <a:t>Sparring-Partnerinnen, nachfragen, feiern</a:t>
+              <a:t>Cockpit-Bot serviert sie dir täglich</a:t>
             </a:r>
           </a:p>
           <a:p>
@@ -5700,7 +5700,7 @@
                 </a:solidFill>
                 <a:latin typeface="Calibri"/>
               </a:rPr>
-              <a:t>Skalieren ist leichter, wenn man nicht allein ist</a:t>
+              <a:t>Du musst den Plan nie mehr suchen</a:t>
             </a:r>
           </a:p>
         </p:txBody>
@@ -5829,7 +5829,7 @@
                 </a:solidFill>
                 <a:latin typeface="Georgia"/>
               </a:rPr>
-              <a:t>Dein Cockpit-Bot als Begleiter</a:t>
+              <a:t>Wer macht was? Die Matrix entscheidet</a:t>
             </a:r>
           </a:p>
         </p:txBody>
@@ -5877,7 +5877,7 @@
                 </a:solidFill>
                 <a:latin typeface="Calibri"/>
               </a:rPr>
-              <a:t>Erinnert dich täglich an deinen Plan</a:t>
+              <a:t>Jede Aufgabe: 🙋 ich / 🤖 KI / ⚙️ System</a:t>
             </a:r>
           </a:p>
           <a:p>
@@ -5902,7 +5902,7 @@
                 </a:solidFill>
                 <a:latin typeface="Calibri"/>
               </a:rPr>
-              <a:t>Hält dich auf Kurs, wächst mit</a:t>
+              <a:t>Die Hälfte landet gar nicht auf deinem Tisch</a:t>
             </a:r>
           </a:p>
           <a:p>
@@ -5927,7 +5927,7 @@
                 </a:solidFill>
                 <a:latin typeface="Calibri"/>
               </a:rPr>
-              <a:t>Programm endet, dein System läuft weiter</a:t>
+              <a:t>Plan = klar UND leicht</a:t>
             </a:r>
           </a:p>
         </p:txBody>
@@ -6056,7 +6056,7 @@
                 </a:solidFill>
                 <a:latin typeface="Georgia"/>
               </a:rPr>
-              <a:t>Live-Call 4 + 90-Tage-Vision</a:t>
+              <a:t>Die Nicht-Liste</a:t>
             </a:r>
           </a:p>
         </p:txBody>
@@ -6104,7 +6104,7 @@
                 </a:solidFill>
                 <a:latin typeface="Calibri"/>
               </a:rPr>
-              <a:t>Abschluss-Call: feiern + nach vorne schauen</a:t>
+              <a:t>Was du bewusst NICHT machst</a:t>
             </a:r>
           </a:p>
           <a:p>
@@ -6129,7 +6129,7 @@
                 </a:solidFill>
                 <a:latin typeface="Calibri"/>
               </a:rPr>
-              <a:t>Komm mit deiner Matrix + deinem Plan</a:t>
+              <a:t>Kein neues Tool, keine neue Plattform, kein 5. Thema</a:t>
             </a:r>
           </a:p>
           <a:p>
@@ -6154,7 +6154,7 @@
                 </a:solidFill>
                 <a:latin typeface="Calibri"/>
               </a:rPr>
-              <a:t>Wir schauen ihn zusammen an</a:t>
+              <a:t>Schützt deinen Fokus mehr als jede To-do-Liste</a:t>
             </a:r>
           </a:p>
         </p:txBody>
@@ -6283,7 +6283,7 @@
                 </a:solidFill>
                 <a:latin typeface="Georgia"/>
               </a:rPr>
-              <a:t>Was du jetzt hast</a:t>
+              <a:t>Fertig besser als perfekt + wie's weitergeht</a:t>
             </a:r>
           </a:p>
         </p:txBody>
@@ -6331,7 +6331,7 @@
                 </a:solidFill>
                 <a:latin typeface="Calibri"/>
               </a:rPr>
-              <a:t>Zeit · Mindset · Struktur · KI · Matrix</a:t>
+              <a:t>Dein Plan darf Version 1 sein</a:t>
             </a:r>
           </a:p>
           <a:p>
@@ -6356,7 +6356,7 @@
                 </a:solidFill>
                 <a:latin typeface="Calibri"/>
               </a:rPr>
-              <a:t>Zwei KI-Mitarbeiter + klarer Plan</a:t>
+              <a:t>Die Community bleibt offen</a:t>
             </a:r>
           </a:p>
           <a:p>
@@ -6381,7 +6381,7 @@
                 </a:solidFill>
                 <a:latin typeface="Calibri"/>
               </a:rPr>
-              <a:t>Eine andere Art zu arbeiten</a:t>
+              <a:t>Cockpit-Bot begleitet dich jeden Morgen</a:t>
             </a:r>
           </a:p>
         </p:txBody>
